--- a/Figures/Classes.pptx
+++ b/Figures/Classes.pptx
@@ -104,6 +104,11 @@
       </a:defRPr>
     </a:lvl9pPr>
   </p:defaultTextStyle>
+  <p:extLst>
+    <p:ext uri="{EFAFB233-063F-42B5-8137-9DF3F51BA10A}">
+      <p15:sldGuideLst xmlns:p15="http://schemas.microsoft.com/office/powerpoint/2012/main"/>
+    </p:ext>
+  </p:extLst>
 </p:presentation>
 </file>
 
@@ -8703,8 +8708,8 @@
         </p:nvSpPr>
         <p:spPr>
           <a:xfrm>
-            <a:off x="3710594" y="-20963"/>
-            <a:ext cx="1272784" cy="338554"/>
+            <a:off x="3710594" y="-84334"/>
+            <a:ext cx="1211870" cy="338554"/>
           </a:xfrm>
           <a:prstGeom prst="rect">
             <a:avLst/>
@@ -8719,7 +8724,7 @@
           <a:p>
             <a:r>
               <a:rPr lang="en-AU" sz="1600" b="1" dirty="0"/>
-              <a:t>Per-ID files:</a:t>
+              <a:t>Per-ID files</a:t>
             </a:r>
           </a:p>
         </p:txBody>
@@ -8738,7 +8743,7 @@
         </p:nvSpPr>
         <p:spPr>
           <a:xfrm>
-            <a:off x="6626136" y="-20963"/>
+            <a:off x="6626136" y="-84334"/>
             <a:ext cx="1596591" cy="338554"/>
           </a:xfrm>
           <a:prstGeom prst="rect">
@@ -8754,7 +8759,7 @@
           <a:p>
             <a:r>
               <a:rPr lang="en-AU" sz="1600" b="1" dirty="0"/>
-              <a:t>Per-Class files:</a:t>
+              <a:t>Per-Class files</a:t>
             </a:r>
           </a:p>
         </p:txBody>
@@ -8773,7 +8778,7 @@
         </p:nvSpPr>
         <p:spPr>
           <a:xfrm>
-            <a:off x="10050030" y="-20963"/>
+            <a:off x="10050030" y="-84334"/>
             <a:ext cx="1662635" cy="338554"/>
           </a:xfrm>
           <a:prstGeom prst="rect">
@@ -8789,8 +8794,164 @@
           <a:p>
             <a:r>
               <a:rPr lang="en-AU" sz="1600" b="1" dirty="0"/>
-              <a:t>Combined files:</a:t>
-            </a:r>
+              <a:t>Combined files</a:t>
+            </a:r>
+          </a:p>
+        </p:txBody>
+      </p:sp>
+      <p:sp>
+        <p:nvSpPr>
+          <p:cNvPr id="2" name="Arrow: Down 1">
+            <a:extLst>
+              <a:ext uri="{FF2B5EF4-FFF2-40B4-BE49-F238E27FC236}">
+                <a16:creationId xmlns:a16="http://schemas.microsoft.com/office/drawing/2014/main" id="{E57D0E55-5495-508E-012E-E0D07F9CCEBE}"/>
+              </a:ext>
+            </a:extLst>
+          </p:cNvPr>
+          <p:cNvSpPr/>
+          <p:nvPr/>
+        </p:nvSpPr>
+        <p:spPr>
+          <a:xfrm>
+            <a:off x="4200808" y="217286"/>
+            <a:ext cx="181069" cy="137995"/>
+          </a:xfrm>
+          <a:prstGeom prst="downArrow">
+            <a:avLst/>
+          </a:prstGeom>
+          <a:solidFill>
+            <a:schemeClr val="tx1"/>
+          </a:solidFill>
+          <a:ln>
+            <a:noFill/>
+          </a:ln>
+        </p:spPr>
+        <p:style>
+          <a:lnRef idx="2">
+            <a:schemeClr val="accent1">
+              <a:shade val="15000"/>
+            </a:schemeClr>
+          </a:lnRef>
+          <a:fillRef idx="1">
+            <a:schemeClr val="accent1"/>
+          </a:fillRef>
+          <a:effectRef idx="0">
+            <a:schemeClr val="accent1"/>
+          </a:effectRef>
+          <a:fontRef idx="minor">
+            <a:schemeClr val="lt1"/>
+          </a:fontRef>
+        </p:style>
+        <p:txBody>
+          <a:bodyPr rtlCol="0" anchor="ctr"/>
+          <a:lstStyle/>
+          <a:p>
+            <a:pPr algn="ctr"/>
+            <a:endParaRPr lang="en-AU"/>
+          </a:p>
+        </p:txBody>
+      </p:sp>
+      <p:sp>
+        <p:nvSpPr>
+          <p:cNvPr id="3" name="Arrow: Down 2">
+            <a:extLst>
+              <a:ext uri="{FF2B5EF4-FFF2-40B4-BE49-F238E27FC236}">
+                <a16:creationId xmlns:a16="http://schemas.microsoft.com/office/drawing/2014/main" id="{A42F5934-C8C4-2446-244C-68307107F274}"/>
+              </a:ext>
+            </a:extLst>
+          </p:cNvPr>
+          <p:cNvSpPr/>
+          <p:nvPr/>
+        </p:nvSpPr>
+        <p:spPr>
+          <a:xfrm>
+            <a:off x="7351053" y="217286"/>
+            <a:ext cx="181069" cy="137995"/>
+          </a:xfrm>
+          <a:prstGeom prst="downArrow">
+            <a:avLst/>
+          </a:prstGeom>
+          <a:solidFill>
+            <a:schemeClr val="tx1"/>
+          </a:solidFill>
+          <a:ln>
+            <a:noFill/>
+          </a:ln>
+        </p:spPr>
+        <p:style>
+          <a:lnRef idx="2">
+            <a:schemeClr val="accent1">
+              <a:shade val="15000"/>
+            </a:schemeClr>
+          </a:lnRef>
+          <a:fillRef idx="1">
+            <a:schemeClr val="accent1"/>
+          </a:fillRef>
+          <a:effectRef idx="0">
+            <a:schemeClr val="accent1"/>
+          </a:effectRef>
+          <a:fontRef idx="minor">
+            <a:schemeClr val="lt1"/>
+          </a:fontRef>
+        </p:style>
+        <p:txBody>
+          <a:bodyPr rtlCol="0" anchor="ctr"/>
+          <a:lstStyle/>
+          <a:p>
+            <a:pPr algn="ctr"/>
+            <a:endParaRPr lang="en-AU"/>
+          </a:p>
+        </p:txBody>
+      </p:sp>
+      <p:sp>
+        <p:nvSpPr>
+          <p:cNvPr id="9" name="Arrow: Down 8">
+            <a:extLst>
+              <a:ext uri="{FF2B5EF4-FFF2-40B4-BE49-F238E27FC236}">
+                <a16:creationId xmlns:a16="http://schemas.microsoft.com/office/drawing/2014/main" id="{C35FEDDA-1213-20EE-DF17-9AC3B59E953E}"/>
+              </a:ext>
+            </a:extLst>
+          </p:cNvPr>
+          <p:cNvSpPr/>
+          <p:nvPr/>
+        </p:nvSpPr>
+        <p:spPr>
+          <a:xfrm>
+            <a:off x="10700279" y="217286"/>
+            <a:ext cx="181069" cy="137995"/>
+          </a:xfrm>
+          <a:prstGeom prst="downArrow">
+            <a:avLst/>
+          </a:prstGeom>
+          <a:solidFill>
+            <a:schemeClr val="tx1"/>
+          </a:solidFill>
+          <a:ln>
+            <a:noFill/>
+          </a:ln>
+        </p:spPr>
+        <p:style>
+          <a:lnRef idx="2">
+            <a:schemeClr val="accent1">
+              <a:shade val="15000"/>
+            </a:schemeClr>
+          </a:lnRef>
+          <a:fillRef idx="1">
+            <a:schemeClr val="accent1"/>
+          </a:fillRef>
+          <a:effectRef idx="0">
+            <a:schemeClr val="accent1"/>
+          </a:effectRef>
+          <a:fontRef idx="minor">
+            <a:schemeClr val="lt1"/>
+          </a:fontRef>
+        </p:style>
+        <p:txBody>
+          <a:bodyPr rtlCol="0" anchor="ctr"/>
+          <a:lstStyle/>
+          <a:p>
+            <a:pPr algn="ctr"/>
+            <a:endParaRPr lang="en-AU"/>
           </a:p>
         </p:txBody>
       </p:sp>
